--- a/10-Knowledge-Products/KP1-GEA/videos/module_1/en/decks/KP1_M1_1.8_Deck_v0.1.pptx
+++ b/10-Knowledge-Products/KP1-GEA/videos/module_1/en/decks/KP1_M1_1.8_Deck_v0.1.pptx
@@ -11880,7 +11880,7 @@
                 </a:solidFill>
                 <a:latin typeface="Arial"/>
               </a:rPr>
-              <a:t>KP1 · Government Enterprise Architecture · Module 1 · Video 1.8</a:t>
+              <a:t>Government Enterprise Architecture · Module 1 · Video 1.8</a:t>
             </a:r>
           </a:p>
           <a:p>
@@ -12569,7 +12569,7 @@
 </p:sld>
 </file>
 
-<file path=ppt/slides/slide56.xml><?xml version="1.0" encoding="utf-8"?>
+<file path=ppt/slides/slide2.xml><?xml version="1.0" encoding="utf-8"?>
 <p:sld xmlns:a="http://schemas.openxmlformats.org/drawingml/2006/main" xmlns:p="http://schemas.openxmlformats.org/presentationml/2006/main" xmlns:r="http://schemas.openxmlformats.org/officeDocument/2006/relationships">
   <p:cSld>
     <p:spTree>
@@ -12608,7 +12608,7 @@
                 </a:solidFill>
                 <a:latin typeface="Arial"/>
               </a:rPr>
-              <a:t>KP1 · MODULE 1 · VIDEO 1.8</a:t>
+              <a:t>MODULE 1 · VIDEO 1.8</a:t>
             </a:r>
           </a:p>
         </p:txBody>
@@ -12757,7 +12757,7 @@
 </p:sld>
 </file>
 
-<file path=ppt/slides/slide57.xml><?xml version="1.0" encoding="utf-8"?>
+<file path=ppt/slides/slide3.xml><?xml version="1.0" encoding="utf-8"?>
 <p:sld xmlns:a="http://schemas.openxmlformats.org/drawingml/2006/main" xmlns:p="http://schemas.openxmlformats.org/presentationml/2006/main" xmlns:r="http://schemas.openxmlformats.org/officeDocument/2006/relationships">
   <p:cSld>
     <p:spTree>
@@ -13207,7 +13207,7 @@
 </p:sld>
 </file>
 
-<file path=ppt/slides/slide58.xml><?xml version="1.0" encoding="utf-8"?>
+<file path=ppt/slides/slide4.xml><?xml version="1.0" encoding="utf-8"?>
 <p:sld xmlns:a="http://schemas.openxmlformats.org/drawingml/2006/main" xmlns:p="http://schemas.openxmlformats.org/presentationml/2006/main" xmlns:r="http://schemas.openxmlformats.org/officeDocument/2006/relationships">
   <p:cSld>
     <p:spTree>
@@ -13657,7 +13657,7 @@
 </p:sld>
 </file>
 
-<file path=ppt/slides/slide59.xml><?xml version="1.0" encoding="utf-8"?>
+<file path=ppt/slides/slide5.xml><?xml version="1.0" encoding="utf-8"?>
 <p:sld xmlns:a="http://schemas.openxmlformats.org/drawingml/2006/main" xmlns:p="http://schemas.openxmlformats.org/presentationml/2006/main" xmlns:r="http://schemas.openxmlformats.org/officeDocument/2006/relationships">
   <p:cSld>
     <p:spTree>
@@ -14123,7 +14123,7 @@
 </p:sld>
 </file>
 
-<file path=ppt/slides/slide60.xml><?xml version="1.0" encoding="utf-8"?>
+<file path=ppt/slides/slide6.xml><?xml version="1.0" encoding="utf-8"?>
 <p:sld xmlns:a="http://schemas.openxmlformats.org/drawingml/2006/main" xmlns:p="http://schemas.openxmlformats.org/presentationml/2006/main" xmlns:r="http://schemas.openxmlformats.org/officeDocument/2006/relationships">
   <p:cSld>
     <p:spTree>
@@ -14573,7 +14573,7 @@
 </p:sld>
 </file>
 
-<file path=ppt/slides/slide61.xml><?xml version="1.0" encoding="utf-8"?>
+<file path=ppt/slides/slide7.xml><?xml version="1.0" encoding="utf-8"?>
 <p:sld xmlns:a="http://schemas.openxmlformats.org/drawingml/2006/main" xmlns:p="http://schemas.openxmlformats.org/presentationml/2006/main" xmlns:r="http://schemas.openxmlformats.org/officeDocument/2006/relationships">
   <p:cSld>
     <p:spTree>
@@ -15238,7 +15238,7 @@
 </p:sld>
 </file>
 
-<file path=ppt/slides/slide62.xml><?xml version="1.0" encoding="utf-8"?>
+<file path=ppt/slides/slide8.xml><?xml version="1.0" encoding="utf-8"?>
 <p:sld xmlns:a="http://schemas.openxmlformats.org/drawingml/2006/main" xmlns:p="http://schemas.openxmlformats.org/presentationml/2006/main" xmlns:r="http://schemas.openxmlformats.org/officeDocument/2006/relationships">
   <p:cSld>
     <p:spTree>
@@ -15393,7 +15393,7 @@
 </p:sld>
 </file>
 
-<file path=ppt/slides/slide63.xml><?xml version="1.0" encoding="utf-8"?>
+<file path=ppt/slides/slide9.xml><?xml version="1.0" encoding="utf-8"?>
 <p:sld xmlns:a="http://schemas.openxmlformats.org/drawingml/2006/main" xmlns:p="http://schemas.openxmlformats.org/presentationml/2006/main" xmlns:r="http://schemas.openxmlformats.org/officeDocument/2006/relationships">
   <p:cSld>
     <p:spTree>
